--- a/catalog/editorial/templates/ed_metrics_stack_3.pptx
+++ b/catalog/editorial/templates/ed_metrics_stack_3.pptx
@@ -3577,7 +3577,7 @@
           <a:noFill/>
         </p:spPr>
         <p:txBody>
-          <a:bodyPr wrap="square" lIns="18288" rIns="18288" tIns="13716" bIns="13716">
+          <a:bodyPr wrap="square" anchor="t" lIns="18288" rIns="18288" tIns="13716" bIns="13716">
             <a:noAutofit/>
           </a:bodyPr>
           <a:lstStyle/>
@@ -3632,7 +3632,7 @@
           <a:noFill/>
         </p:spPr>
         <p:txBody>
-          <a:bodyPr wrap="square" lIns="18288" rIns="18288" tIns="13716" bIns="13716">
+          <a:bodyPr wrap="square" anchor="t" lIns="18288" rIns="18288" tIns="13716" bIns="13716">
             <a:noAutofit/>
           </a:bodyPr>
           <a:lstStyle/>
@@ -3687,7 +3687,7 @@
           <a:noFill/>
         </p:spPr>
         <p:txBody>
-          <a:bodyPr wrap="square" lIns="18288" rIns="18288" tIns="13716" bIns="13716">
+          <a:bodyPr wrap="square" anchor="t" lIns="18288" rIns="18288" tIns="13716" bIns="13716">
             <a:noAutofit/>
           </a:bodyPr>
           <a:lstStyle/>
@@ -3786,7 +3786,7 @@
           <a:noFill/>
         </p:spPr>
         <p:txBody>
-          <a:bodyPr wrap="square" lIns="18288" rIns="18288" tIns="13716" bIns="13716">
+          <a:bodyPr wrap="square" anchor="t" lIns="18288" rIns="18288" tIns="13716" bIns="13716">
             <a:noAutofit/>
           </a:bodyPr>
           <a:lstStyle/>
@@ -3841,7 +3841,7 @@
           <a:noFill/>
         </p:spPr>
         <p:txBody>
-          <a:bodyPr wrap="square" lIns="18288" rIns="18288" tIns="13716" bIns="13716">
+          <a:bodyPr wrap="square" anchor="t" lIns="18288" rIns="18288" tIns="13716" bIns="13716">
             <a:noAutofit/>
           </a:bodyPr>
           <a:lstStyle/>
@@ -3933,8 +3933,8 @@
         </p:nvSpPr>
         <p:spPr>
           <a:xfrm>
-            <a:off x="832104" y="2386584"/>
-            <a:ext cx="2560320" cy="640080"/>
+            <a:off x="832104" y="2167127"/>
+            <a:ext cx="2560320" cy="1133856"/>
           </a:xfrm>
           <a:prstGeom prst="rect">
             <a:avLst/>
@@ -3942,7 +3942,7 @@
           <a:noFill/>
         </p:spPr>
         <p:txBody>
-          <a:bodyPr wrap="square" lIns="18288" rIns="18288" tIns="13716" bIns="13716">
+          <a:bodyPr wrap="square" anchor="ctr" lIns="18288" rIns="18288" tIns="13716" bIns="13716">
             <a:noAutofit/>
           </a:bodyPr>
           <a:lstStyle/>
@@ -3988,8 +3988,8 @@
         </p:nvSpPr>
         <p:spPr>
           <a:xfrm>
-            <a:off x="3621024" y="2304288"/>
-            <a:ext cx="1828800" cy="795528"/>
+            <a:off x="3621024" y="2167127"/>
+            <a:ext cx="1828800" cy="1133856"/>
           </a:xfrm>
           <a:prstGeom prst="rect">
             <a:avLst/>
@@ -3997,7 +3997,7 @@
           <a:noFill/>
         </p:spPr>
         <p:txBody>
-          <a:bodyPr wrap="square" lIns="18288" rIns="18288" tIns="13716" bIns="13716">
+          <a:bodyPr wrap="square" anchor="ctr" lIns="18288" rIns="18288" tIns="13716" bIns="13716">
             <a:noAutofit/>
           </a:bodyPr>
           <a:lstStyle/>
@@ -4043,8 +4043,8 @@
         </p:nvSpPr>
         <p:spPr>
           <a:xfrm>
-            <a:off x="5815584" y="2322576"/>
-            <a:ext cx="5394960" cy="841248"/>
+            <a:off x="5815584" y="2167127"/>
+            <a:ext cx="5394960" cy="1133856"/>
           </a:xfrm>
           <a:prstGeom prst="rect">
             <a:avLst/>
@@ -4052,7 +4052,7 @@
           <a:noFill/>
         </p:spPr>
         <p:txBody>
-          <a:bodyPr wrap="square" lIns="18288" rIns="18288" tIns="13716" bIns="13716">
+          <a:bodyPr wrap="square" anchor="ctr" lIns="18288" rIns="18288" tIns="13716" bIns="13716">
             <a:noAutofit/>
           </a:bodyPr>
           <a:lstStyle/>
@@ -4144,8 +4144,8 @@
         </p:nvSpPr>
         <p:spPr>
           <a:xfrm>
-            <a:off x="832104" y="3703320"/>
-            <a:ext cx="2560320" cy="640080"/>
+            <a:off x="832104" y="3483863"/>
+            <a:ext cx="2560320" cy="1133856"/>
           </a:xfrm>
           <a:prstGeom prst="rect">
             <a:avLst/>
@@ -4153,7 +4153,7 @@
           <a:noFill/>
         </p:spPr>
         <p:txBody>
-          <a:bodyPr wrap="square" lIns="18288" rIns="18288" tIns="13716" bIns="13716">
+          <a:bodyPr wrap="square" anchor="ctr" lIns="18288" rIns="18288" tIns="13716" bIns="13716">
             <a:noAutofit/>
           </a:bodyPr>
           <a:lstStyle/>
@@ -4199,8 +4199,8 @@
         </p:nvSpPr>
         <p:spPr>
           <a:xfrm>
-            <a:off x="3621024" y="3621024"/>
-            <a:ext cx="1828800" cy="795528"/>
+            <a:off x="3621024" y="3483863"/>
+            <a:ext cx="1828800" cy="1133856"/>
           </a:xfrm>
           <a:prstGeom prst="rect">
             <a:avLst/>
@@ -4208,7 +4208,7 @@
           <a:noFill/>
         </p:spPr>
         <p:txBody>
-          <a:bodyPr wrap="square" lIns="18288" rIns="18288" tIns="13716" bIns="13716">
+          <a:bodyPr wrap="square" anchor="ctr" lIns="18288" rIns="18288" tIns="13716" bIns="13716">
             <a:noAutofit/>
           </a:bodyPr>
           <a:lstStyle/>
@@ -4254,8 +4254,8 @@
         </p:nvSpPr>
         <p:spPr>
           <a:xfrm>
-            <a:off x="5815584" y="3639312"/>
-            <a:ext cx="5394960" cy="841248"/>
+            <a:off x="5815584" y="3483863"/>
+            <a:ext cx="5394960" cy="1133856"/>
           </a:xfrm>
           <a:prstGeom prst="rect">
             <a:avLst/>
@@ -4263,7 +4263,7 @@
           <a:noFill/>
         </p:spPr>
         <p:txBody>
-          <a:bodyPr wrap="square" lIns="18288" rIns="18288" tIns="13716" bIns="13716">
+          <a:bodyPr wrap="square" anchor="ctr" lIns="18288" rIns="18288" tIns="13716" bIns="13716">
             <a:noAutofit/>
           </a:bodyPr>
           <a:lstStyle/>
@@ -4355,8 +4355,8 @@
         </p:nvSpPr>
         <p:spPr>
           <a:xfrm>
-            <a:off x="832104" y="5020056"/>
-            <a:ext cx="2560320" cy="640080"/>
+            <a:off x="832104" y="4800600"/>
+            <a:ext cx="2560320" cy="1133856"/>
           </a:xfrm>
           <a:prstGeom prst="rect">
             <a:avLst/>
@@ -4364,7 +4364,7 @@
           <a:noFill/>
         </p:spPr>
         <p:txBody>
-          <a:bodyPr wrap="square" lIns="18288" rIns="18288" tIns="13716" bIns="13716">
+          <a:bodyPr wrap="square" anchor="ctr" lIns="18288" rIns="18288" tIns="13716" bIns="13716">
             <a:noAutofit/>
           </a:bodyPr>
           <a:lstStyle/>
@@ -4410,8 +4410,8 @@
         </p:nvSpPr>
         <p:spPr>
           <a:xfrm>
-            <a:off x="3621024" y="4937759"/>
-            <a:ext cx="1828800" cy="795528"/>
+            <a:off x="3621024" y="4800600"/>
+            <a:ext cx="1828800" cy="1133856"/>
           </a:xfrm>
           <a:prstGeom prst="rect">
             <a:avLst/>
@@ -4419,7 +4419,7 @@
           <a:noFill/>
         </p:spPr>
         <p:txBody>
-          <a:bodyPr wrap="square" lIns="18288" rIns="18288" tIns="13716" bIns="13716">
+          <a:bodyPr wrap="square" anchor="ctr" lIns="18288" rIns="18288" tIns="13716" bIns="13716">
             <a:noAutofit/>
           </a:bodyPr>
           <a:lstStyle/>
@@ -4465,8 +4465,8 @@
         </p:nvSpPr>
         <p:spPr>
           <a:xfrm>
-            <a:off x="5815584" y="4956048"/>
-            <a:ext cx="5394960" cy="841248"/>
+            <a:off x="5815584" y="4800600"/>
+            <a:ext cx="5394960" cy="1133856"/>
           </a:xfrm>
           <a:prstGeom prst="rect">
             <a:avLst/>
@@ -4474,7 +4474,7 @@
           <a:noFill/>
         </p:spPr>
         <p:txBody>
-          <a:bodyPr wrap="square" lIns="18288" rIns="18288" tIns="13716" bIns="13716">
+          <a:bodyPr wrap="square" anchor="ctr" lIns="18288" rIns="18288" tIns="13716" bIns="13716">
             <a:noAutofit/>
           </a:bodyPr>
           <a:lstStyle/>
